--- a/project_01/docs/Yu_EDES301_project_01_proposal.pptx
+++ b/project_01/docs/Yu_EDES301_project_01_proposal.pptx
@@ -219,7 +219,7 @@
           <a:p>
             <a:fld id="{59041DB8-B66F-4DC8-A96E-33677E0F90FF}" type="datetimeFigureOut">
               <a:rPr lang="en-US" smtClean="0"/>
-              <a:t>10/4/26</a:t>
+              <a:t>10/8/26</a:t>
             </a:fld>
             <a:endParaRPr lang="en-US"/>
           </a:p>
@@ -384,7 +384,7 @@
           <a:p>
             <a:fld id="{DEB49C4A-65AC-492D-9701-81B46C3AD0E4}" type="datetimeFigureOut">
               <a:rPr lang="en-US" smtClean="0"/>
-              <a:t>10/4/26</a:t>
+              <a:t>10/8/26</a:t>
             </a:fld>
             <a:endParaRPr lang="en-US"/>
           </a:p>
@@ -2792,7 +2792,7 @@
           <a:p>
             <a:fld id="{384A29A4-78C8-47AB-BA06-22CB45938951}" type="datetime1">
               <a:rPr lang="en-US" smtClean="0"/>
-              <a:t>10/4/26</a:t>
+              <a:t>10/8/26</a:t>
             </a:fld>
             <a:endParaRPr lang="en-US"/>
           </a:p>
@@ -2987,7 +2987,7 @@
           <a:p>
             <a:fld id="{E1ED4ACF-2D82-46F2-A8E9-23963AA34E86}" type="datetime1">
               <a:rPr lang="en-US" smtClean="0"/>
-              <a:t>10/4/26</a:t>
+              <a:t>10/8/26</a:t>
             </a:fld>
             <a:endParaRPr lang="en-US"/>
           </a:p>
@@ -3181,7 +3181,7 @@
           <a:p>
             <a:fld id="{AE374B5B-21A0-4192-BF4C-38187F1A68D8}" type="datetime1">
               <a:rPr lang="en-US" smtClean="0"/>
-              <a:t>10/4/26</a:t>
+              <a:t>10/8/26</a:t>
             </a:fld>
             <a:endParaRPr lang="en-US"/>
           </a:p>
@@ -5522,7 +5522,7 @@
           <a:p>
             <a:fld id="{33B5CF7C-B333-48E1-A4A6-83A3C8B73AC0}" type="datetime1">
               <a:rPr lang="en-US" smtClean="0"/>
-              <a:t>10/4/26</a:t>
+              <a:t>10/8/26</a:t>
             </a:fld>
             <a:endParaRPr lang="en-US"/>
           </a:p>
@@ -5975,7 +5975,7 @@
           <a:p>
             <a:fld id="{AE320762-5CBF-4210-AB54-376B091119F8}" type="datetime1">
               <a:rPr lang="en-US" smtClean="0"/>
-              <a:t>10/4/26</a:t>
+              <a:t>10/8/26</a:t>
             </a:fld>
             <a:endParaRPr lang="en-US"/>
           </a:p>
@@ -6107,7 +6107,7 @@
           <a:p>
             <a:fld id="{7F0DB371-BF5F-4058-A212-1A908E4D2674}" type="datetime1">
               <a:rPr lang="en-US" smtClean="0"/>
-              <a:t>10/4/26</a:t>
+              <a:t>10/8/26</a:t>
             </a:fld>
             <a:endParaRPr lang="en-US"/>
           </a:p>
@@ -8040,7 +8040,7 @@
           <a:p>
             <a:fld id="{60A4083B-90AA-48CF-BAD5-00AA24D7F288}" type="datetime1">
               <a:rPr lang="en-US" smtClean="0"/>
-              <a:t>10/4/26</a:t>
+              <a:t>10/8/26</a:t>
             </a:fld>
             <a:endParaRPr lang="en-US"/>
           </a:p>
@@ -10299,7 +10299,7 @@
             <a:fld id="{F5BAF629-ECA2-4CF3-B790-9D9BDED98269}" type="datetime1">
               <a:rPr lang="en-US" smtClean="0"/>
               <a:pPr/>
-              <a:t>10/4/26</a:t>
+              <a:t>10/8/26</a:t>
             </a:fld>
             <a:endParaRPr lang="en-US"/>
           </a:p>
@@ -14594,7 +14594,7 @@
             <a:fld id="{B51B2453-8663-4C69-AF73-9FD7B1DEC5D0}" type="datetime1">
               <a:rPr lang="en-US" smtClean="0"/>
               <a:pPr/>
-              <a:t>10/4/26</a:t>
+              <a:t>10/8/26</a:t>
             </a:fld>
             <a:endParaRPr lang="en-US" dirty="0"/>
           </a:p>
@@ -15492,6 +15492,23 @@
               <a:rPr sz="1600" dirty="0"/>
               <a:t>blink-artifact rejection, logging EEG data to the SD card</a:t>
             </a:r>
+            <a:endParaRPr lang="en-US" sz="1600" dirty="0"/>
+          </a:p>
+          <a:p>
+            <a:pPr lvl="1"/>
+            <a:r>
+              <a:rPr lang="en-US" sz="1600" dirty="0"/>
+              <a:t> </a:t>
+            </a:r>
+            <a:r>
+              <a:rPr lang="en-US" sz="1600" b="1" dirty="0"/>
+              <a:t>Fallback</a:t>
+            </a:r>
+            <a:r>
+              <a:rPr lang="en-US" sz="1600" dirty="0"/>
+              <a:t>: if occipital alpha is unreliable due to hair/electrode contact, switch to EOG double-blink detection using the same hardware.</a:t>
+            </a:r>
+            <a:endParaRPr sz="1600" dirty="0"/>
           </a:p>
         </p:txBody>
       </p:sp>
@@ -18213,14 +18230,14 @@
             <p:ph idx="1"/>
             <p:extLst>
               <p:ext uri="{D42A27DB-BD31-4B8C-83A1-F6EECF244321}">
-                <p14:modId xmlns:p14="http://schemas.microsoft.com/office/powerpoint/2010/main" val="831346113"/>
+                <p14:modId xmlns:p14="http://schemas.microsoft.com/office/powerpoint/2010/main" val="802157580"/>
               </p:ext>
             </p:extLst>
           </p:nvPr>
         </p:nvGraphicFramePr>
         <p:xfrm>
           <a:off x="609600" y="1295400"/>
-          <a:ext cx="10972800" cy="3235960"/>
+          <a:ext cx="10972800" cy="3606800"/>
         </p:xfrm>
         <a:graphic>
           <a:graphicData uri="http://schemas.openxmlformats.org/drawingml/2006/table">
@@ -18280,7 +18297,7 @@
                       <a:pPr algn="ctr"/>
                       <a:r>
                         <a:rPr lang="en-US" dirty="0"/>
-                        <a:t xml:space="preserve"> to Buy?</a:t>
+                        <a:t> to Buy?</a:t>
                       </a:r>
                     </a:p>
                   </a:txBody>
@@ -18316,8 +18333,11 @@
                         <a:rPr lang="en-US" dirty="0">
                           <a:hlinkClick r:id="rId2"/>
                         </a:rPr>
-                        <a:t>BioAmp EXG Pill kit (2 boards, 15 gel electrodes, cables)</a:t>
+                        <a:t>BioAmp EXG Pill kit </a:t>
                       </a:r>
+                      <a:endParaRPr lang="en-US" dirty="0">
+                        <a:hlinkClick r:id="rId3"/>
+                      </a:endParaRPr>
                     </a:p>
                   </a:txBody>
                   <a:tcPr anchor="ctr"/>
@@ -18630,6 +18650,69 @@
                   </a:ext>
                 </a:extLst>
               </a:tr>
+              <a:tr h="370840">
+                <a:tc>
+                  <a:txBody>
+                    <a:bodyPr/>
+                    <a:lstStyle/>
+                    <a:p>
+                      <a:r>
+                        <a:rPr lang="en-US" dirty="0"/>
+                        <a:t>10k Resistor </a:t>
+                      </a:r>
+                    </a:p>
+                  </a:txBody>
+                  <a:tcPr anchor="ctr"/>
+                </a:tc>
+                <a:tc>
+                  <a:txBody>
+                    <a:bodyPr/>
+                    <a:lstStyle/>
+                    <a:p>
+                      <a:r>
+                        <a:rPr lang="en-US" dirty="0"/>
+                        <a:t>No</a:t>
+                      </a:r>
+                    </a:p>
+                  </a:txBody>
+                  <a:tcPr/>
+                </a:tc>
+                <a:tc>
+                  <a:txBody>
+                    <a:bodyPr/>
+                    <a:lstStyle/>
+                    <a:p>
+                      <a:pPr marL="0" marR="0" lvl="0" indent="0" algn="l" defTabSz="914400" rtl="0" eaLnBrk="1" fontAlgn="auto" latinLnBrk="0" hangingPunct="1">
+                        <a:lnSpc>
+                          <a:spcPct val="100000"/>
+                        </a:lnSpc>
+                        <a:spcBef>
+                          <a:spcPts val="0"/>
+                        </a:spcBef>
+                        <a:spcAft>
+                          <a:spcPts val="0"/>
+                        </a:spcAft>
+                        <a:buClrTx/>
+                        <a:buSzTx/>
+                        <a:buFontTx/>
+                        <a:buNone/>
+                        <a:tabLst/>
+                        <a:defRPr/>
+                      </a:pPr>
+                      <a:r>
+                        <a:rPr lang="en-US" dirty="0"/>
+                        <a:t>—</a:t>
+                      </a:r>
+                    </a:p>
+                  </a:txBody>
+                  <a:tcPr/>
+                </a:tc>
+                <a:extLst>
+                  <a:ext uri="{0D108BD9-81ED-4DB2-BD59-A6C34878D82A}">
+                    <a16:rowId xmlns:a16="http://schemas.microsoft.com/office/drawing/2014/main" val="1680297032"/>
+                  </a:ext>
+                </a:extLst>
+              </a:tr>
             </a:tbl>
           </a:graphicData>
         </a:graphic>
@@ -18642,7 +18725,7 @@
         </p:nvSpPr>
         <p:spPr>
           <a:xfrm>
-            <a:off x="609904" y="4846320"/>
+            <a:off x="609600" y="5295900"/>
             <a:ext cx="10972800" cy="731520"/>
           </a:xfrm>
           <a:prstGeom prst="rect">
@@ -18676,8 +18759,16 @@
           </a:p>
           <a:p>
             <a:r>
-              <a:rPr sz="1600"/>
-              <a:t>The BioAmp kit (Mouser) is the only part not on the EDES301 parts list.</a:t>
+              <a:rPr sz="1600" dirty="0"/>
+              <a:t>The </a:t>
+            </a:r>
+            <a:r>
+              <a:rPr sz="1600" dirty="0" err="1"/>
+              <a:t>BioAmp</a:t>
+            </a:r>
+            <a:r>
+              <a:rPr sz="1600" dirty="0"/>
+              <a:t> kit (Mouser) is the only part not on the EDES301 parts list.</a:t>
             </a:r>
           </a:p>
         </p:txBody>
